--- a/dist/초3/수학/도형과측정/초3_수학_도형과측정_01_선분·반직선·직선과각_학생용.pptx
+++ b/dist/초3/수학/도형과측정/초3_수학_도형과측정_01_선분·반직선·직선과각_학생용.pptx
@@ -120,13 +120,13 @@
   <p:extLst>
     <p:ext uri="{521415D9-36F7-43E2-AB2F-B90AF26B5E84}">
       <p14:sectionLst xmlns:p14="http://schemas.microsoft.com/office/powerpoint/2010/main">
-        <p14:section name="도입" id="{d24cbd73-445e-0d2d-3b78-8e5ae8e67993}">
+        <p14:section name="도입" id="{da256322-127b-546d-edeb-5b96666d4cfd}">
           <p14:sldIdLst>
             <p14:sldId id="256"/>
             <p14:sldId id="257"/>
           </p14:sldIdLst>
         </p14:section>
-        <p14:section name="개념" id="{04e21ae0-cae0-6c09-1928-e7c5cf72838a}">
+        <p14:section name="개념" id="{56046541-2a28-e313-2408-22ae3b0fe61b}">
           <p14:sldIdLst>
             <p14:sldId id="258"/>
             <p14:sldId id="259"/>
@@ -134,7 +134,7 @@
             <p14:sldId id="263"/>
           </p14:sldIdLst>
         </p14:section>
-        <p14:section name="연습" id="{9dfb6872-cfd9-69f1-2558-559ecb8260a2}">
+        <p14:section name="연습" id="{6193d56a-6ff3-2f5f-9d04-a4caab966118}">
           <p14:sldIdLst>
             <p14:sldId id="261"/>
             <p14:sldId id="262"/>
@@ -142,24 +142,24 @@
             <p14:sldId id="265"/>
           </p14:sldIdLst>
         </p14:section>
-        <p14:section name="개념" id="{ceabedc7-651f-05a2-ddee-7333f198da82}">
+        <p14:section name="개념" id="{970ddc95-cbcf-e496-0ebd-49e99519caae}">
           <p14:sldIdLst/>
         </p14:section>
-        <p14:section name="연습" id="{14db330e-d4e9-d307-d64a-70c078ba2f3b}">
+        <p14:section name="연습" id="{36acdb15-1ae3-129c-f96a-6ce21496fda6}">
           <p14:sldIdLst/>
         </p14:section>
-        <p14:section name="확인" id="{3004a17d-a10b-dbd8-0eb8-887e75035479}">
+        <p14:section name="확인" id="{27862ff1-6976-f4d7-7f0f-fed5866cc4e0}">
           <p14:sldIdLst>
             <p14:sldId id="266"/>
             <p14:sldId id="267"/>
           </p14:sldIdLst>
         </p14:section>
-        <p14:section name="정리" id="{330bd0fb-a135-fdc3-07c3-9bda719779f3}">
+        <p14:section name="정리" id="{587e6edb-62bc-d290-4c5a-7f5388cad7c5}">
           <p14:sldIdLst>
             <p14:sldId id="268"/>
           </p14:sldIdLst>
         </p14:section>
-        <p14:section name="보충" id="{c5872963-206f-a85d-10e2-2202ac357faa}">
+        <p14:section name="보충" id="{f832ad4d-0b15-548b-68c2-e63dd143a2ed}">
           <p14:sldIdLst>
             <p14:sldId id="269"/>
           </p14:sldIdLst>
@@ -2795,7 +2795,7 @@
               <a:buNone/>
             </a:pPr>
             <a:r>
-              <a:rPr lang="ko-KR" altLang="en-US" sz="4600" b="1" dirty="0">
+              <a:rPr lang="ko-KR" altLang="en-US" sz="4200" b="1" dirty="0">
                 <a:solidFill>
                   <a:srgbClr val="FFFFFF"/>
                 </a:solidFill>
@@ -2885,7 +2885,7 @@
         </p:nvSpPr>
         <p:spPr>
           <a:xfrm>
-            <a:off x="7892681" y="2682240"/>
+            <a:off x="7722931" y="2804160"/>
             <a:ext cx="792480" cy="792480"/>
           </a:xfrm>
           <a:prstGeom prst="pie">
@@ -2913,8 +2913,8 @@
         </p:nvSpPr>
         <p:spPr>
           <a:xfrm flipV="1">
-            <a:off x="8288921" y="1127760"/>
-            <a:ext cx="1300480" cy="1950720"/>
+            <a:off x="8119171" y="1005840"/>
+            <a:ext cx="1463040" cy="2194560"/>
           </a:xfrm>
           <a:prstGeom prst="line">
             <a:avLst/>
@@ -2936,8 +2936,8 @@
         </p:nvSpPr>
         <p:spPr>
           <a:xfrm>
-            <a:off x="8288921" y="3078480"/>
-            <a:ext cx="2715997" cy="0"/>
+            <a:off x="8119171" y="3200400"/>
+            <a:ext cx="3055497" cy="0"/>
           </a:xfrm>
           <a:prstGeom prst="line">
             <a:avLst/>
@@ -2959,7 +2959,7 @@
         </p:nvSpPr>
         <p:spPr>
           <a:xfrm>
-            <a:off x="9195173" y="1570512"/>
+            <a:off x="9146134" y="1511366"/>
             <a:ext cx="118872" cy="118872"/>
           </a:xfrm>
           <a:prstGeom prst="ellipse">
@@ -2984,7 +2984,7 @@
         </p:nvSpPr>
         <p:spPr>
           <a:xfrm>
-            <a:off x="8229485" y="3019044"/>
+            <a:off x="8059735" y="3140964"/>
             <a:ext cx="118872" cy="118872"/>
           </a:xfrm>
           <a:prstGeom prst="ellipse">
@@ -3009,7 +3009,7 @@
         </p:nvSpPr>
         <p:spPr>
           <a:xfrm>
-            <a:off x="10341928" y="3019044"/>
+            <a:off x="10436233" y="3140964"/>
             <a:ext cx="118872" cy="118872"/>
           </a:xfrm>
           <a:prstGeom prst="ellipse">
@@ -3034,8 +3034,8 @@
         </p:nvSpPr>
         <p:spPr>
           <a:xfrm>
-            <a:off x="8847506" y="1304190"/>
-            <a:ext cx="408432" cy="381000"/>
+            <a:off x="8748683" y="1181544"/>
+            <a:ext cx="508000" cy="508000"/>
           </a:xfrm>
           <a:prstGeom prst="rect">
             <a:avLst/>
@@ -3051,7 +3051,7 @@
               <a:buNone/>
             </a:pPr>
             <a:r>
-              <a:rPr lang="ko-KR" altLang="en-US" sz="2400" b="1" dirty="0">
+              <a:rPr lang="ko-KR" altLang="en-US" sz="3200" b="1" dirty="0">
                 <a:solidFill>
                   <a:srgbClr val="1F2937"/>
                 </a:solidFill>
@@ -3061,7 +3061,7 @@
               </a:rPr>
               <a:t>ㄱ</a:t>
             </a:r>
-            <a:endParaRPr lang="ko-KR" sz="2400" dirty="0"/>
+            <a:endParaRPr lang="ko-KR" sz="3200" dirty="0"/>
           </a:p>
         </p:txBody>
       </p:sp>
@@ -3073,8 +3073,8 @@
         </p:nvSpPr>
         <p:spPr>
           <a:xfrm>
-            <a:off x="7869718" y="3003038"/>
-            <a:ext cx="408432" cy="381000"/>
+            <a:off x="7650184" y="3061458"/>
+            <a:ext cx="508000" cy="508000"/>
           </a:xfrm>
           <a:prstGeom prst="rect">
             <a:avLst/>
@@ -3090,7 +3090,7 @@
               <a:buNone/>
             </a:pPr>
             <a:r>
-              <a:rPr lang="ko-KR" altLang="en-US" sz="2400" b="1" dirty="0">
+              <a:rPr lang="ko-KR" altLang="en-US" sz="3200" b="1" dirty="0">
                 <a:solidFill>
                   <a:srgbClr val="1F2937"/>
                 </a:solidFill>
@@ -3100,7 +3100,7 @@
               </a:rPr>
               <a:t>ㄴ</a:t>
             </a:r>
-            <a:endParaRPr lang="ko-KR" sz="2400" dirty="0"/>
+            <a:endParaRPr lang="ko-KR" sz="3200" dirty="0"/>
           </a:p>
         </p:txBody>
       </p:sp>
@@ -3112,8 +3112,8 @@
         </p:nvSpPr>
         <p:spPr>
           <a:xfrm>
-            <a:off x="10197148" y="2644140"/>
-            <a:ext cx="408432" cy="381000"/>
+            <a:off x="10241669" y="2702560"/>
+            <a:ext cx="508000" cy="508000"/>
           </a:xfrm>
           <a:prstGeom prst="rect">
             <a:avLst/>
@@ -3129,7 +3129,7 @@
               <a:buNone/>
             </a:pPr>
             <a:r>
-              <a:rPr lang="ko-KR" altLang="en-US" sz="2400" b="1" dirty="0">
+              <a:rPr lang="ko-KR" altLang="en-US" sz="3200" b="1" dirty="0">
                 <a:solidFill>
                   <a:srgbClr val="1F2937"/>
                 </a:solidFill>
@@ -3139,7 +3139,7 @@
               </a:rPr>
               <a:t>ㄷ</a:t>
             </a:r>
-            <a:endParaRPr lang="ko-KR" sz="2400" dirty="0"/>
+            <a:endParaRPr lang="ko-KR" sz="3200" dirty="0"/>
           </a:p>
         </p:txBody>
       </p:sp>
@@ -3874,8 +3874,8 @@
         </p:nvSpPr>
         <p:spPr>
           <a:xfrm flipH="1">
-            <a:off x="1831848" y="2538578"/>
-            <a:ext cx="3592068" cy="957885"/>
+            <a:off x="1709928" y="2506066"/>
+            <a:ext cx="3835908" cy="1022909"/>
           </a:xfrm>
           <a:prstGeom prst="line">
             <a:avLst/>
@@ -3897,7 +3897,7 @@
         </p:nvSpPr>
         <p:spPr>
           <a:xfrm>
-            <a:off x="5364480" y="2479142"/>
+            <a:off x="5486400" y="2446630"/>
             <a:ext cx="118872" cy="118872"/>
           </a:xfrm>
           <a:prstGeom prst="ellipse">
@@ -3922,7 +3922,7 @@
         </p:nvSpPr>
         <p:spPr>
           <a:xfrm>
-            <a:off x="2942509" y="3125001"/>
+            <a:off x="2900018" y="3136331"/>
             <a:ext cx="118872" cy="118872"/>
           </a:xfrm>
           <a:prstGeom prst="ellipse">
@@ -3947,8 +3947,8 @@
         </p:nvSpPr>
         <p:spPr>
           <a:xfrm>
-            <a:off x="5455307" y="2285249"/>
-            <a:ext cx="408432" cy="381000"/>
+            <a:off x="5527443" y="2189237"/>
+            <a:ext cx="508000" cy="508000"/>
           </a:xfrm>
           <a:prstGeom prst="rect">
             <a:avLst/>
@@ -3964,7 +3964,7 @@
               <a:buNone/>
             </a:pPr>
             <a:r>
-              <a:rPr lang="ko-KR" altLang="en-US" sz="2400" b="1" dirty="0">
+              <a:rPr lang="ko-KR" altLang="en-US" sz="3200" b="1" dirty="0">
                 <a:solidFill>
                   <a:srgbClr val="1F2937"/>
                 </a:solidFill>
@@ -3974,7 +3974,7 @@
               </a:rPr>
               <a:t>ㅌ</a:t>
             </a:r>
-            <a:endParaRPr lang="ko-KR" sz="2400" dirty="0"/>
+            <a:endParaRPr lang="ko-KR" sz="3200" dirty="0"/>
           </a:p>
         </p:txBody>
       </p:sp>
@@ -3986,8 +3986,8 @@
         </p:nvSpPr>
         <p:spPr>
           <a:xfrm>
-            <a:off x="2734900" y="2758330"/>
-            <a:ext cx="408432" cy="381000"/>
+            <a:off x="2642626" y="2706161"/>
+            <a:ext cx="508000" cy="508000"/>
           </a:xfrm>
           <a:prstGeom prst="rect">
             <a:avLst/>
@@ -4003,7 +4003,7 @@
               <a:buNone/>
             </a:pPr>
             <a:r>
-              <a:rPr lang="ko-KR" altLang="en-US" sz="2400" b="1" dirty="0">
+              <a:rPr lang="ko-KR" altLang="en-US" sz="3200" b="1" dirty="0">
                 <a:solidFill>
                   <a:srgbClr val="1F2937"/>
                 </a:solidFill>
@@ -4013,7 +4013,7 @@
               </a:rPr>
               <a:t>ㅋ</a:t>
             </a:r>
-            <a:endParaRPr lang="ko-KR" sz="2400" dirty="0"/>
+            <a:endParaRPr lang="ko-KR" sz="3200" dirty="0"/>
           </a:p>
         </p:txBody>
       </p:sp>
@@ -4145,8 +4145,8 @@
         </p:nvSpPr>
         <p:spPr>
           <a:xfrm>
-            <a:off x="7311848" y="2511500"/>
-            <a:ext cx="408432" cy="381000"/>
+            <a:off x="7262064" y="2448000"/>
+            <a:ext cx="508000" cy="508000"/>
           </a:xfrm>
           <a:prstGeom prst="rect">
             <a:avLst/>
@@ -4162,7 +4162,7 @@
               <a:buNone/>
             </a:pPr>
             <a:r>
-              <a:rPr lang="ko-KR" altLang="en-US" sz="2400" b="1" dirty="0">
+              <a:rPr lang="ko-KR" altLang="en-US" sz="3200" b="1" dirty="0">
                 <a:solidFill>
                   <a:srgbClr val="1F2937"/>
                 </a:solidFill>
@@ -4172,7 +4172,7 @@
               </a:rPr>
               <a:t>ㅍ</a:t>
             </a:r>
-            <a:endParaRPr lang="ko-KR" sz="2400" dirty="0"/>
+            <a:endParaRPr lang="ko-KR" sz="3200" dirty="0"/>
           </a:p>
         </p:txBody>
       </p:sp>
@@ -4184,8 +4184,8 @@
         </p:nvSpPr>
         <p:spPr>
           <a:xfrm>
-            <a:off x="10992916" y="3142540"/>
-            <a:ext cx="408432" cy="381000"/>
+            <a:off x="10943132" y="3079040"/>
+            <a:ext cx="508000" cy="508000"/>
           </a:xfrm>
           <a:prstGeom prst="rect">
             <a:avLst/>
@@ -4201,7 +4201,7 @@
               <a:buNone/>
             </a:pPr>
             <a:r>
-              <a:rPr lang="ko-KR" altLang="en-US" sz="2400" b="1" dirty="0">
+              <a:rPr lang="ko-KR" altLang="en-US" sz="3200" b="1" dirty="0">
                 <a:solidFill>
                   <a:srgbClr val="1F2937"/>
                 </a:solidFill>
@@ -4211,7 +4211,7 @@
               </a:rPr>
               <a:t>ㅎ</a:t>
             </a:r>
-            <a:endParaRPr lang="ko-KR" sz="2400" dirty="0"/>
+            <a:endParaRPr lang="ko-KR" sz="3200" dirty="0"/>
           </a:p>
         </p:txBody>
       </p:sp>
@@ -6402,8 +6402,8 @@
         </p:nvSpPr>
         <p:spPr>
           <a:xfrm flipV="1">
-            <a:off x="1036320" y="2908021"/>
-            <a:ext cx="4387596" cy="1316279"/>
+            <a:off x="944118" y="2880360"/>
+            <a:ext cx="4572000" cy="1371600"/>
           </a:xfrm>
           <a:prstGeom prst="line">
             <a:avLst/>
@@ -6425,7 +6425,7 @@
         </p:nvSpPr>
         <p:spPr>
           <a:xfrm>
-            <a:off x="976884" y="4164863"/>
+            <a:off x="884682" y="4192524"/>
             <a:ext cx="118872" cy="118872"/>
           </a:xfrm>
           <a:prstGeom prst="ellipse">
@@ -6450,7 +6450,7 @@
         </p:nvSpPr>
         <p:spPr>
           <a:xfrm>
-            <a:off x="5364480" y="2848585"/>
+            <a:off x="5456682" y="2820924"/>
             <a:ext cx="118872" cy="118872"/>
           </a:xfrm>
           <a:prstGeom prst="ellipse">
@@ -6475,8 +6475,8 @@
         </p:nvSpPr>
         <p:spPr>
           <a:xfrm>
-            <a:off x="598548" y="4103866"/>
-            <a:ext cx="408432" cy="381000"/>
+            <a:off x="456562" y="4068027"/>
+            <a:ext cx="508000" cy="508000"/>
           </a:xfrm>
           <a:prstGeom prst="rect">
             <a:avLst/>
@@ -6492,7 +6492,7 @@
               <a:buNone/>
             </a:pPr>
             <a:r>
-              <a:rPr lang="ko-KR" altLang="en-US" sz="2400" b="1" dirty="0">
+              <a:rPr lang="ko-KR" altLang="en-US" sz="3200" b="1" dirty="0">
                 <a:solidFill>
                   <a:srgbClr val="1F2937"/>
                 </a:solidFill>
@@ -6502,7 +6502,7 @@
               </a:rPr>
               <a:t>ㄱ</a:t>
             </a:r>
-            <a:endParaRPr lang="ko-KR" sz="2400" dirty="0"/>
+            <a:endParaRPr lang="ko-KR" sz="3200" dirty="0"/>
           </a:p>
         </p:txBody>
       </p:sp>
@@ -6514,8 +6514,8 @@
         </p:nvSpPr>
         <p:spPr>
           <a:xfrm>
-            <a:off x="5453256" y="2647454"/>
-            <a:ext cx="408432" cy="381000"/>
+            <a:off x="5495674" y="2556293"/>
+            <a:ext cx="508000" cy="508000"/>
           </a:xfrm>
           <a:prstGeom prst="rect">
             <a:avLst/>
@@ -6531,7 +6531,7 @@
               <a:buNone/>
             </a:pPr>
             <a:r>
-              <a:rPr lang="ko-KR" altLang="en-US" sz="2400" b="1" dirty="0">
+              <a:rPr lang="ko-KR" altLang="en-US" sz="3200" b="1" dirty="0">
                 <a:solidFill>
                   <a:srgbClr val="1F2937"/>
                 </a:solidFill>
@@ -6541,7 +6541,7 @@
               </a:rPr>
               <a:t>ㄴ</a:t>
             </a:r>
-            <a:endParaRPr lang="ko-KR" sz="2400" dirty="0"/>
+            <a:endParaRPr lang="ko-KR" sz="3200" dirty="0"/>
           </a:p>
         </p:txBody>
       </p:sp>
@@ -7151,8 +7151,8 @@
         </p:nvSpPr>
         <p:spPr>
           <a:xfrm>
-            <a:off x="1663446" y="3137154"/>
-            <a:ext cx="1254252" cy="0"/>
+            <a:off x="1602486" y="3137154"/>
+            <a:ext cx="1376172" cy="0"/>
           </a:xfrm>
           <a:prstGeom prst="line">
             <a:avLst/>
@@ -7174,7 +7174,7 @@
         </p:nvSpPr>
         <p:spPr>
           <a:xfrm>
-            <a:off x="1604010" y="3077718"/>
+            <a:off x="1543050" y="3077718"/>
             <a:ext cx="118872" cy="118872"/>
           </a:xfrm>
           <a:prstGeom prst="ellipse">
@@ -7199,7 +7199,7 @@
         </p:nvSpPr>
         <p:spPr>
           <a:xfrm>
-            <a:off x="2858262" y="3077718"/>
+            <a:off x="2919222" y="3077718"/>
             <a:ext cx="118872" cy="118872"/>
           </a:xfrm>
           <a:prstGeom prst="ellipse">
@@ -7224,8 +7224,8 @@
         </p:nvSpPr>
         <p:spPr>
           <a:xfrm>
-            <a:off x="1459230" y="3190494"/>
-            <a:ext cx="408432" cy="381000"/>
+            <a:off x="1348486" y="3126994"/>
+            <a:ext cx="508000" cy="508000"/>
           </a:xfrm>
           <a:prstGeom prst="rect">
             <a:avLst/>
@@ -7241,7 +7241,7 @@
               <a:buNone/>
             </a:pPr>
             <a:r>
-              <a:rPr lang="ko-KR" altLang="en-US" sz="2400" b="1" dirty="0">
+              <a:rPr lang="ko-KR" altLang="en-US" sz="3200" b="1" dirty="0">
                 <a:solidFill>
                   <a:srgbClr val="1F2937"/>
                 </a:solidFill>
@@ -7251,7 +7251,7 @@
               </a:rPr>
               <a:t>ㄱ</a:t>
             </a:r>
-            <a:endParaRPr lang="ko-KR" sz="2400" dirty="0"/>
+            <a:endParaRPr lang="ko-KR" sz="3200" dirty="0"/>
           </a:p>
         </p:txBody>
       </p:sp>
@@ -7263,8 +7263,8 @@
         </p:nvSpPr>
         <p:spPr>
           <a:xfrm>
-            <a:off x="2713482" y="3190494"/>
-            <a:ext cx="408432" cy="381000"/>
+            <a:off x="2724658" y="3126994"/>
+            <a:ext cx="508000" cy="508000"/>
           </a:xfrm>
           <a:prstGeom prst="rect">
             <a:avLst/>
@@ -7280,7 +7280,7 @@
               <a:buNone/>
             </a:pPr>
             <a:r>
-              <a:rPr lang="ko-KR" altLang="en-US" sz="2400" b="1" dirty="0">
+              <a:rPr lang="ko-KR" altLang="en-US" sz="3200" b="1" dirty="0">
                 <a:solidFill>
                   <a:srgbClr val="1F2937"/>
                 </a:solidFill>
@@ -7290,7 +7290,7 @@
               </a:rPr>
               <a:t>ㄴ</a:t>
             </a:r>
-            <a:endParaRPr lang="ko-KR" sz="2400" dirty="0"/>
+            <a:endParaRPr lang="ko-KR" sz="3200" dirty="0"/>
           </a:p>
         </p:txBody>
       </p:sp>
@@ -7341,8 +7341,8 @@
         </p:nvSpPr>
         <p:spPr>
           <a:xfrm>
-            <a:off x="5467350" y="3137154"/>
-            <a:ext cx="1881378" cy="0"/>
+            <a:off x="5406390" y="3137154"/>
+            <a:ext cx="2064258" cy="0"/>
           </a:xfrm>
           <a:prstGeom prst="line">
             <a:avLst/>
@@ -7364,7 +7364,7 @@
         </p:nvSpPr>
         <p:spPr>
           <a:xfrm>
-            <a:off x="5407914" y="3077718"/>
+            <a:off x="5346954" y="3077718"/>
             <a:ext cx="118872" cy="118872"/>
           </a:xfrm>
           <a:prstGeom prst="ellipse">
@@ -7389,7 +7389,7 @@
         </p:nvSpPr>
         <p:spPr>
           <a:xfrm>
-            <a:off x="6662166" y="3077718"/>
+            <a:off x="6723126" y="3077718"/>
             <a:ext cx="118872" cy="118872"/>
           </a:xfrm>
           <a:prstGeom prst="ellipse">
@@ -7414,8 +7414,8 @@
         </p:nvSpPr>
         <p:spPr>
           <a:xfrm>
-            <a:off x="5263134" y="3190494"/>
-            <a:ext cx="408432" cy="381000"/>
+            <a:off x="5152390" y="3126994"/>
+            <a:ext cx="508000" cy="508000"/>
           </a:xfrm>
           <a:prstGeom prst="rect">
             <a:avLst/>
@@ -7431,7 +7431,7 @@
               <a:buNone/>
             </a:pPr>
             <a:r>
-              <a:rPr lang="ko-KR" altLang="en-US" sz="2400" b="1" dirty="0">
+              <a:rPr lang="ko-KR" altLang="en-US" sz="3200" b="1" dirty="0">
                 <a:solidFill>
                   <a:srgbClr val="1F2937"/>
                 </a:solidFill>
@@ -7441,7 +7441,7 @@
               </a:rPr>
               <a:t>ㄱ</a:t>
             </a:r>
-            <a:endParaRPr lang="ko-KR" sz="2400" dirty="0"/>
+            <a:endParaRPr lang="ko-KR" sz="3200" dirty="0"/>
           </a:p>
         </p:txBody>
       </p:sp>
@@ -7453,8 +7453,8 @@
         </p:nvSpPr>
         <p:spPr>
           <a:xfrm>
-            <a:off x="6517386" y="3190494"/>
-            <a:ext cx="408432" cy="381000"/>
+            <a:off x="6528562" y="3126994"/>
+            <a:ext cx="508000" cy="508000"/>
           </a:xfrm>
           <a:prstGeom prst="rect">
             <a:avLst/>
@@ -7470,7 +7470,7 @@
               <a:buNone/>
             </a:pPr>
             <a:r>
-              <a:rPr lang="ko-KR" altLang="en-US" sz="2400" b="1" dirty="0">
+              <a:rPr lang="ko-KR" altLang="en-US" sz="3200" b="1" dirty="0">
                 <a:solidFill>
                   <a:srgbClr val="1F2937"/>
                 </a:solidFill>
@@ -7480,7 +7480,7 @@
               </a:rPr>
               <a:t>ㄴ</a:t>
             </a:r>
-            <a:endParaRPr lang="ko-KR" sz="2400" dirty="0"/>
+            <a:endParaRPr lang="ko-KR" sz="3200" dirty="0"/>
           </a:p>
         </p:txBody>
       </p:sp>
@@ -7531,8 +7531,8 @@
         </p:nvSpPr>
         <p:spPr>
           <a:xfrm>
-            <a:off x="8644128" y="3137154"/>
-            <a:ext cx="2508504" cy="0"/>
+            <a:off x="8522208" y="3137154"/>
+            <a:ext cx="2752344" cy="0"/>
           </a:xfrm>
           <a:prstGeom prst="line">
             <a:avLst/>
@@ -7554,7 +7554,7 @@
         </p:nvSpPr>
         <p:spPr>
           <a:xfrm>
-            <a:off x="9211818" y="3077718"/>
+            <a:off x="9150858" y="3077718"/>
             <a:ext cx="118872" cy="118872"/>
           </a:xfrm>
           <a:prstGeom prst="ellipse">
@@ -7579,7 +7579,7 @@
         </p:nvSpPr>
         <p:spPr>
           <a:xfrm>
-            <a:off x="10466070" y="3077718"/>
+            <a:off x="10527030" y="3077718"/>
             <a:ext cx="118872" cy="118872"/>
           </a:xfrm>
           <a:prstGeom prst="ellipse">
@@ -7604,8 +7604,8 @@
         </p:nvSpPr>
         <p:spPr>
           <a:xfrm>
-            <a:off x="9067038" y="3190494"/>
-            <a:ext cx="408432" cy="381000"/>
+            <a:off x="8956294" y="3126994"/>
+            <a:ext cx="508000" cy="508000"/>
           </a:xfrm>
           <a:prstGeom prst="rect">
             <a:avLst/>
@@ -7621,7 +7621,7 @@
               <a:buNone/>
             </a:pPr>
             <a:r>
-              <a:rPr lang="ko-KR" altLang="en-US" sz="2400" b="1" dirty="0">
+              <a:rPr lang="ko-KR" altLang="en-US" sz="3200" b="1" dirty="0">
                 <a:solidFill>
                   <a:srgbClr val="1F2937"/>
                 </a:solidFill>
@@ -7631,7 +7631,7 @@
               </a:rPr>
               <a:t>ㄱ</a:t>
             </a:r>
-            <a:endParaRPr lang="ko-KR" sz="2400" dirty="0"/>
+            <a:endParaRPr lang="ko-KR" sz="3200" dirty="0"/>
           </a:p>
         </p:txBody>
       </p:sp>
@@ -7643,8 +7643,8 @@
         </p:nvSpPr>
         <p:spPr>
           <a:xfrm>
-            <a:off x="10321290" y="3190494"/>
-            <a:ext cx="408432" cy="381000"/>
+            <a:off x="10332466" y="3126994"/>
+            <a:ext cx="508000" cy="508000"/>
           </a:xfrm>
           <a:prstGeom prst="rect">
             <a:avLst/>
@@ -7660,7 +7660,7 @@
               <a:buNone/>
             </a:pPr>
             <a:r>
-              <a:rPr lang="ko-KR" altLang="en-US" sz="2400" b="1" dirty="0">
+              <a:rPr lang="ko-KR" altLang="en-US" sz="3200" b="1" dirty="0">
                 <a:solidFill>
                   <a:srgbClr val="1F2937"/>
                 </a:solidFill>
@@ -7670,7 +7670,7 @@
               </a:rPr>
               <a:t>ㄴ</a:t>
             </a:r>
-            <a:endParaRPr lang="ko-KR" sz="2400" dirty="0"/>
+            <a:endParaRPr lang="ko-KR" sz="3200" dirty="0"/>
           </a:p>
         </p:txBody>
       </p:sp>
@@ -8052,8 +8052,8 @@
         </p:nvSpPr>
         <p:spPr>
           <a:xfrm>
-            <a:off x="2138934" y="3137154"/>
-            <a:ext cx="3307842" cy="0"/>
+            <a:off x="2077974" y="3137154"/>
+            <a:ext cx="3490722" cy="0"/>
           </a:xfrm>
           <a:prstGeom prst="line">
             <a:avLst/>
@@ -8075,7 +8075,7 @@
         </p:nvSpPr>
         <p:spPr>
           <a:xfrm>
-            <a:off x="2079498" y="3077718"/>
+            <a:off x="2018538" y="3077718"/>
             <a:ext cx="118872" cy="118872"/>
           </a:xfrm>
           <a:prstGeom prst="ellipse">
@@ -8100,7 +8100,7 @@
         </p:nvSpPr>
         <p:spPr>
           <a:xfrm>
-            <a:off x="4284726" y="3077718"/>
+            <a:off x="4345686" y="3077718"/>
             <a:ext cx="118872" cy="118872"/>
           </a:xfrm>
           <a:prstGeom prst="ellipse">
@@ -8125,8 +8125,8 @@
         </p:nvSpPr>
         <p:spPr>
           <a:xfrm>
-            <a:off x="1934718" y="3190494"/>
-            <a:ext cx="408432" cy="381000"/>
+            <a:off x="1823974" y="3126994"/>
+            <a:ext cx="508000" cy="508000"/>
           </a:xfrm>
           <a:prstGeom prst="rect">
             <a:avLst/>
@@ -8142,7 +8142,7 @@
               <a:buNone/>
             </a:pPr>
             <a:r>
-              <a:rPr lang="ko-KR" altLang="en-US" sz="2400" b="1" dirty="0">
+              <a:rPr lang="ko-KR" altLang="en-US" sz="3200" b="1" dirty="0">
                 <a:solidFill>
                   <a:srgbClr val="1F2937"/>
                 </a:solidFill>
@@ -8152,7 +8152,7 @@
               </a:rPr>
               <a:t>ㄱ</a:t>
             </a:r>
-            <a:endParaRPr lang="ko-KR" sz="2400" dirty="0"/>
+            <a:endParaRPr lang="ko-KR" sz="3200" dirty="0"/>
           </a:p>
         </p:txBody>
       </p:sp>
@@ -8164,8 +8164,8 @@
         </p:nvSpPr>
         <p:spPr>
           <a:xfrm>
-            <a:off x="4139946" y="3190494"/>
-            <a:ext cx="408432" cy="381000"/>
+            <a:off x="4151122" y="3126994"/>
+            <a:ext cx="508000" cy="508000"/>
           </a:xfrm>
           <a:prstGeom prst="rect">
             <a:avLst/>
@@ -8181,7 +8181,7 @@
               <a:buNone/>
             </a:pPr>
             <a:r>
-              <a:rPr lang="ko-KR" altLang="en-US" sz="2400" b="1" dirty="0">
+              <a:rPr lang="ko-KR" altLang="en-US" sz="3200" b="1" dirty="0">
                 <a:solidFill>
                   <a:srgbClr val="1F2937"/>
                 </a:solidFill>
@@ -8191,7 +8191,7 @@
               </a:rPr>
               <a:t>ㄴ</a:t>
             </a:r>
-            <a:endParaRPr lang="ko-KR" sz="2400" dirty="0"/>
+            <a:endParaRPr lang="ko-KR" sz="3200" dirty="0"/>
           </a:p>
         </p:txBody>
       </p:sp>
@@ -8242,8 +8242,8 @@
         </p:nvSpPr>
         <p:spPr>
           <a:xfrm flipH="1">
-            <a:off x="6742176" y="3137154"/>
-            <a:ext cx="3307842" cy="0"/>
+            <a:off x="6620256" y="3137154"/>
+            <a:ext cx="3490722" cy="0"/>
           </a:xfrm>
           <a:prstGeom prst="line">
             <a:avLst/>
@@ -8265,7 +8265,7 @@
         </p:nvSpPr>
         <p:spPr>
           <a:xfrm>
-            <a:off x="9990582" y="3077718"/>
+            <a:off x="10051542" y="3077718"/>
             <a:ext cx="118872" cy="118872"/>
           </a:xfrm>
           <a:prstGeom prst="ellipse">
@@ -8290,7 +8290,7 @@
         </p:nvSpPr>
         <p:spPr>
           <a:xfrm>
-            <a:off x="7785354" y="3077718"/>
+            <a:off x="7724394" y="3077718"/>
             <a:ext cx="118872" cy="118872"/>
           </a:xfrm>
           <a:prstGeom prst="ellipse">
@@ -8315,8 +8315,8 @@
         </p:nvSpPr>
         <p:spPr>
           <a:xfrm>
-            <a:off x="9845802" y="3190494"/>
-            <a:ext cx="408432" cy="381000"/>
+            <a:off x="9856978" y="3126994"/>
+            <a:ext cx="508000" cy="508000"/>
           </a:xfrm>
           <a:prstGeom prst="rect">
             <a:avLst/>
@@ -8332,7 +8332,7 @@
               <a:buNone/>
             </a:pPr>
             <a:r>
-              <a:rPr lang="ko-KR" altLang="en-US" sz="2400" b="1" dirty="0">
+              <a:rPr lang="ko-KR" altLang="en-US" sz="3200" b="1" dirty="0">
                 <a:solidFill>
                   <a:srgbClr val="1F2937"/>
                 </a:solidFill>
@@ -8342,7 +8342,7 @@
               </a:rPr>
               <a:t>ㄴ</a:t>
             </a:r>
-            <a:endParaRPr lang="ko-KR" sz="2400" dirty="0"/>
+            <a:endParaRPr lang="ko-KR" sz="3200" dirty="0"/>
           </a:p>
         </p:txBody>
       </p:sp>
@@ -8354,8 +8354,8 @@
         </p:nvSpPr>
         <p:spPr>
           <a:xfrm>
-            <a:off x="7640574" y="3190494"/>
-            <a:ext cx="408432" cy="381000"/>
+            <a:off x="7529830" y="3126994"/>
+            <a:ext cx="508000" cy="508000"/>
           </a:xfrm>
           <a:prstGeom prst="rect">
             <a:avLst/>
@@ -8371,7 +8371,7 @@
               <a:buNone/>
             </a:pPr>
             <a:r>
-              <a:rPr lang="ko-KR" altLang="en-US" sz="2400" b="1" dirty="0">
+              <a:rPr lang="ko-KR" altLang="en-US" sz="3200" b="1" dirty="0">
                 <a:solidFill>
                   <a:srgbClr val="1F2937"/>
                 </a:solidFill>
@@ -8381,7 +8381,7 @@
               </a:rPr>
               <a:t>ㄱ</a:t>
             </a:r>
-            <a:endParaRPr lang="ko-KR" sz="2400" dirty="0"/>
+            <a:endParaRPr lang="ko-KR" sz="3200" dirty="0"/>
           </a:p>
         </p:txBody>
       </p:sp>
@@ -8701,8 +8701,8 @@
         </p:nvSpPr>
         <p:spPr>
           <a:xfrm>
-            <a:off x="1860042" y="2499360"/>
-            <a:ext cx="3535680" cy="441960"/>
+            <a:off x="1799082" y="2491740"/>
+            <a:ext cx="3657600" cy="457200"/>
           </a:xfrm>
           <a:prstGeom prst="line">
             <a:avLst/>
@@ -8724,7 +8724,7 @@
         </p:nvSpPr>
         <p:spPr>
           <a:xfrm>
-            <a:off x="1800606" y="2439924"/>
+            <a:off x="1739646" y="2432304"/>
             <a:ext cx="118872" cy="118872"/>
           </a:xfrm>
           <a:prstGeom prst="ellipse">
@@ -8749,7 +8749,7 @@
         </p:nvSpPr>
         <p:spPr>
           <a:xfrm>
-            <a:off x="5336286" y="2881884"/>
+            <a:off x="5397246" y="2889504"/>
             <a:ext cx="118872" cy="118872"/>
           </a:xfrm>
           <a:prstGeom prst="ellipse">
@@ -8774,8 +8774,8 @@
         </p:nvSpPr>
         <p:spPr>
           <a:xfrm>
-            <a:off x="1413869" y="2278615"/>
-            <a:ext cx="408432" cy="381000"/>
+            <a:off x="1303125" y="2207495"/>
+            <a:ext cx="508000" cy="508000"/>
           </a:xfrm>
           <a:prstGeom prst="rect">
             <a:avLst/>
@@ -8791,7 +8791,7 @@
               <a:buNone/>
             </a:pPr>
             <a:r>
-              <a:rPr lang="ko-KR" altLang="en-US" sz="2400" b="1" dirty="0">
+              <a:rPr lang="ko-KR" altLang="en-US" sz="3200" b="1" dirty="0">
                 <a:solidFill>
                   <a:srgbClr val="1F2937"/>
                 </a:solidFill>
@@ -8801,7 +8801,7 @@
               </a:rPr>
               <a:t>ㄷ</a:t>
             </a:r>
-            <a:endParaRPr lang="ko-KR" sz="2400" dirty="0"/>
+            <a:endParaRPr lang="ko-KR" sz="3200" dirty="0"/>
           </a:p>
         </p:txBody>
       </p:sp>
@@ -8813,8 +8813,8 @@
         </p:nvSpPr>
         <p:spPr>
           <a:xfrm>
-            <a:off x="5433463" y="2781065"/>
-            <a:ext cx="408432" cy="381000"/>
+            <a:off x="5444639" y="2725185"/>
+            <a:ext cx="508000" cy="508000"/>
           </a:xfrm>
           <a:prstGeom prst="rect">
             <a:avLst/>
@@ -8830,7 +8830,7 @@
               <a:buNone/>
             </a:pPr>
             <a:r>
-              <a:rPr lang="ko-KR" altLang="en-US" sz="2400" b="1" dirty="0">
+              <a:rPr lang="ko-KR" altLang="en-US" sz="3200" b="1" dirty="0">
                 <a:solidFill>
                   <a:srgbClr val="1F2937"/>
                 </a:solidFill>
@@ -8840,7 +8840,7 @@
               </a:rPr>
               <a:t>ㄹ</a:t>
             </a:r>
-            <a:endParaRPr lang="ko-KR" sz="2400" dirty="0"/>
+            <a:endParaRPr lang="ko-KR" sz="3200" dirty="0"/>
           </a:p>
         </p:txBody>
       </p:sp>
@@ -8899,8 +8899,8 @@
         </p:nvSpPr>
         <p:spPr>
           <a:xfrm flipV="1">
-            <a:off x="7699248" y="2499360"/>
-            <a:ext cx="3314700" cy="441960"/>
+            <a:off x="7356348" y="2453640"/>
+            <a:ext cx="4000500" cy="533400"/>
           </a:xfrm>
           <a:prstGeom prst="line">
             <a:avLst/>
@@ -8922,7 +8922,7 @@
         </p:nvSpPr>
         <p:spPr>
           <a:xfrm>
-            <a:off x="8464836" y="2771881"/>
+            <a:off x="8292631" y="2794841"/>
             <a:ext cx="118872" cy="118872"/>
           </a:xfrm>
           <a:prstGeom prst="ellipse">
@@ -8947,7 +8947,7 @@
         </p:nvSpPr>
         <p:spPr>
           <a:xfrm>
-            <a:off x="10129488" y="2549927"/>
+            <a:off x="10301693" y="2526967"/>
             <a:ext cx="118872" cy="118872"/>
           </a:xfrm>
           <a:prstGeom prst="ellipse">
@@ -8972,8 +8972,8 @@
         </p:nvSpPr>
         <p:spPr>
           <a:xfrm>
-            <a:off x="8287830" y="2399116"/>
-            <a:ext cx="408432" cy="381000"/>
+            <a:off x="8065840" y="2358576"/>
+            <a:ext cx="508000" cy="508000"/>
           </a:xfrm>
           <a:prstGeom prst="rect">
             <a:avLst/>
@@ -8989,7 +8989,7 @@
               <a:buNone/>
             </a:pPr>
             <a:r>
-              <a:rPr lang="ko-KR" altLang="en-US" sz="2400" b="1" dirty="0">
+              <a:rPr lang="ko-KR" altLang="en-US" sz="3200" b="1" dirty="0">
                 <a:solidFill>
                   <a:srgbClr val="1F2937"/>
                 </a:solidFill>
@@ -8999,7 +8999,7 @@
               </a:rPr>
               <a:t>ㅁ</a:t>
             </a:r>
-            <a:endParaRPr lang="ko-KR" sz="2400" dirty="0"/>
+            <a:endParaRPr lang="ko-KR" sz="3200" dirty="0"/>
           </a:p>
         </p:txBody>
       </p:sp>
@@ -9011,8 +9011,8 @@
         </p:nvSpPr>
         <p:spPr>
           <a:xfrm>
-            <a:off x="9952481" y="2177162"/>
-            <a:ext cx="408432" cy="381000"/>
+            <a:off x="10074902" y="2090702"/>
+            <a:ext cx="508000" cy="508000"/>
           </a:xfrm>
           <a:prstGeom prst="rect">
             <a:avLst/>
@@ -9028,7 +9028,7 @@
               <a:buNone/>
             </a:pPr>
             <a:r>
-              <a:rPr lang="ko-KR" altLang="en-US" sz="2400" b="1" dirty="0">
+              <a:rPr lang="ko-KR" altLang="en-US" sz="3200" b="1" dirty="0">
                 <a:solidFill>
                   <a:srgbClr val="1F2937"/>
                 </a:solidFill>
@@ -9038,7 +9038,7 @@
               </a:rPr>
               <a:t>ㅂ</a:t>
             </a:r>
-            <a:endParaRPr lang="ko-KR" sz="2400" dirty="0"/>
+            <a:endParaRPr lang="ko-KR" sz="3200" dirty="0"/>
           </a:p>
         </p:txBody>
       </p:sp>
@@ -9097,8 +9097,8 @@
         </p:nvSpPr>
         <p:spPr>
           <a:xfrm>
-            <a:off x="1831848" y="4411980"/>
-            <a:ext cx="3592068" cy="0"/>
+            <a:off x="1627632" y="4411980"/>
+            <a:ext cx="4000500" cy="0"/>
           </a:xfrm>
           <a:prstGeom prst="line">
             <a:avLst/>
@@ -9120,7 +9120,7 @@
         </p:nvSpPr>
         <p:spPr>
           <a:xfrm>
-            <a:off x="1772412" y="4352544"/>
+            <a:off x="1568196" y="4352544"/>
             <a:ext cx="118872" cy="118872"/>
           </a:xfrm>
           <a:prstGeom prst="ellipse">
@@ -9145,7 +9145,7 @@
         </p:nvSpPr>
         <p:spPr>
           <a:xfrm>
-            <a:off x="4167124" y="4352544"/>
+            <a:off x="4235196" y="4352544"/>
             <a:ext cx="118872" cy="118872"/>
           </a:xfrm>
           <a:prstGeom prst="ellipse">
@@ -9170,8 +9170,8 @@
         </p:nvSpPr>
         <p:spPr>
           <a:xfrm>
-            <a:off x="1383792" y="4221480"/>
-            <a:ext cx="408432" cy="381000"/>
+            <a:off x="1129792" y="4157980"/>
+            <a:ext cx="508000" cy="508000"/>
           </a:xfrm>
           <a:prstGeom prst="rect">
             <a:avLst/>
@@ -9187,7 +9187,7 @@
               <a:buNone/>
             </a:pPr>
             <a:r>
-              <a:rPr lang="ko-KR" altLang="en-US" sz="2400" b="1" dirty="0">
+              <a:rPr lang="ko-KR" altLang="en-US" sz="3200" b="1" dirty="0">
                 <a:solidFill>
                   <a:srgbClr val="1F2937"/>
                 </a:solidFill>
@@ -9197,7 +9197,7 @@
               </a:rPr>
               <a:t>ㅅ</a:t>
             </a:r>
-            <a:endParaRPr lang="ko-KR" sz="2400" dirty="0"/>
+            <a:endParaRPr lang="ko-KR" sz="3200" dirty="0"/>
           </a:p>
         </p:txBody>
       </p:sp>
@@ -9209,8 +9209,8 @@
         </p:nvSpPr>
         <p:spPr>
           <a:xfrm>
-            <a:off x="4022344" y="3977640"/>
-            <a:ext cx="408432" cy="381000"/>
+            <a:off x="4040632" y="3914140"/>
+            <a:ext cx="508000" cy="508000"/>
           </a:xfrm>
           <a:prstGeom prst="rect">
             <a:avLst/>
@@ -9226,7 +9226,7 @@
               <a:buNone/>
             </a:pPr>
             <a:r>
-              <a:rPr lang="ko-KR" altLang="en-US" sz="2400" b="1" dirty="0">
+              <a:rPr lang="ko-KR" altLang="en-US" sz="3200" b="1" dirty="0">
                 <a:solidFill>
                   <a:srgbClr val="1F2937"/>
                 </a:solidFill>
@@ -9236,7 +9236,7 @@
               </a:rPr>
               <a:t>ㅇ</a:t>
             </a:r>
-            <a:endParaRPr lang="ko-KR" sz="2400" dirty="0"/>
+            <a:endParaRPr lang="ko-KR" sz="3200" dirty="0"/>
           </a:p>
         </p:txBody>
       </p:sp>
@@ -9295,8 +9295,8 @@
         </p:nvSpPr>
         <p:spPr>
           <a:xfrm flipH="1" flipV="1">
-            <a:off x="7699248" y="4191000"/>
-            <a:ext cx="3314700" cy="441960"/>
+            <a:off x="7356348" y="4145280"/>
+            <a:ext cx="4000500" cy="533400"/>
           </a:xfrm>
           <a:prstGeom prst="line">
             <a:avLst/>
@@ -9318,7 +9318,7 @@
         </p:nvSpPr>
         <p:spPr>
           <a:xfrm>
-            <a:off x="10954512" y="4573524"/>
+            <a:off x="11297412" y="4619244"/>
             <a:ext cx="118872" cy="118872"/>
           </a:xfrm>
           <a:prstGeom prst="ellipse">
@@ -9343,7 +9343,7 @@
         </p:nvSpPr>
         <p:spPr>
           <a:xfrm>
-            <a:off x="8738232" y="4278020"/>
+            <a:off x="8622591" y="4262601"/>
             <a:ext cx="118872" cy="118872"/>
           </a:xfrm>
           <a:prstGeom prst="ellipse">
@@ -9368,8 +9368,8 @@
         </p:nvSpPr>
         <p:spPr>
           <a:xfrm>
-            <a:off x="11051433" y="4474687"/>
-            <a:ext cx="408432" cy="381000"/>
+            <a:off x="11344549" y="4456907"/>
+            <a:ext cx="508000" cy="508000"/>
           </a:xfrm>
           <a:prstGeom prst="rect">
             <a:avLst/>
@@ -9385,7 +9385,7 @@
               <a:buNone/>
             </a:pPr>
             <a:r>
-              <a:rPr lang="ko-KR" altLang="en-US" sz="2400" b="1" dirty="0">
+              <a:rPr lang="ko-KR" altLang="en-US" sz="3200" b="1" dirty="0">
                 <a:solidFill>
                   <a:srgbClr val="1F2937"/>
                 </a:solidFill>
@@ -9395,7 +9395,7 @@
               </a:rPr>
               <a:t>ㅊ</a:t>
             </a:r>
-            <a:endParaRPr lang="ko-KR" sz="2400" dirty="0"/>
+            <a:endParaRPr lang="ko-KR" sz="3200" dirty="0"/>
           </a:p>
         </p:txBody>
       </p:sp>
@@ -9407,8 +9407,8 @@
         </p:nvSpPr>
         <p:spPr>
           <a:xfrm>
-            <a:off x="8625678" y="3905255"/>
-            <a:ext cx="408432" cy="381000"/>
+            <a:off x="8460254" y="3826336"/>
+            <a:ext cx="508000" cy="508000"/>
           </a:xfrm>
           <a:prstGeom prst="rect">
             <a:avLst/>
@@ -9424,7 +9424,7 @@
               <a:buNone/>
             </a:pPr>
             <a:r>
-              <a:rPr lang="ko-KR" altLang="en-US" sz="2400" b="1" dirty="0">
+              <a:rPr lang="ko-KR" altLang="en-US" sz="3200" b="1" dirty="0">
                 <a:solidFill>
                   <a:srgbClr val="1F2937"/>
                 </a:solidFill>
@@ -9434,7 +9434,7 @@
               </a:rPr>
               <a:t>ㅈ</a:t>
             </a:r>
-            <a:endParaRPr lang="ko-KR" sz="2400" dirty="0"/>
+            <a:endParaRPr lang="ko-KR" sz="3200" dirty="0"/>
           </a:p>
         </p:txBody>
       </p:sp>
@@ -10331,7 +10331,7 @@
         </p:nvSpPr>
         <p:spPr>
           <a:xfrm>
-            <a:off x="1288534" y="4236720"/>
+            <a:off x="1111923" y="4358640"/>
             <a:ext cx="792480" cy="792480"/>
           </a:xfrm>
           <a:prstGeom prst="pie">
@@ -10359,8 +10359,8 @@
         </p:nvSpPr>
         <p:spPr>
           <a:xfrm flipV="1">
-            <a:off x="1684774" y="2499360"/>
-            <a:ext cx="1312985" cy="2133600"/>
+            <a:off x="1508163" y="2377440"/>
+            <a:ext cx="1463040" cy="2377440"/>
           </a:xfrm>
           <a:prstGeom prst="line">
             <a:avLst/>
@@ -10382,8 +10382,8 @@
         </p:nvSpPr>
         <p:spPr>
           <a:xfrm>
-            <a:off x="1684774" y="4632960"/>
-            <a:ext cx="3090688" cy="0"/>
+            <a:off x="1508163" y="4754880"/>
+            <a:ext cx="3443910" cy="0"/>
           </a:xfrm>
           <a:prstGeom prst="line">
             <a:avLst/>
@@ -10405,7 +10405,7 @@
         </p:nvSpPr>
         <p:spPr>
           <a:xfrm>
-            <a:off x="2614358" y="2966366"/>
+            <a:off x="2550778" y="2904611"/>
             <a:ext cx="118872" cy="118872"/>
           </a:xfrm>
           <a:prstGeom prst="ellipse">
@@ -10430,7 +10430,7 @@
         </p:nvSpPr>
         <p:spPr>
           <a:xfrm>
-            <a:off x="1625338" y="4573524"/>
+            <a:off x="1448727" y="4695444"/>
             <a:ext cx="118872" cy="118872"/>
           </a:xfrm>
           <a:prstGeom prst="ellipse">
@@ -10455,7 +10455,7 @@
         </p:nvSpPr>
         <p:spPr>
           <a:xfrm>
-            <a:off x="4097888" y="4573524"/>
+            <a:off x="4203855" y="4695444"/>
             <a:ext cx="118872" cy="118872"/>
           </a:xfrm>
           <a:prstGeom prst="ellipse">
@@ -10480,8 +10480,8 @@
         </p:nvSpPr>
         <p:spPr>
           <a:xfrm>
-            <a:off x="2261910" y="2707506"/>
-            <a:ext cx="408432" cy="381000"/>
+            <a:off x="2148546" y="2582251"/>
+            <a:ext cx="508000" cy="508000"/>
           </a:xfrm>
           <a:prstGeom prst="rect">
             <a:avLst/>
@@ -10497,7 +10497,7 @@
               <a:buNone/>
             </a:pPr>
             <a:r>
-              <a:rPr lang="ko-KR" altLang="en-US" sz="2400" b="1" dirty="0">
+              <a:rPr lang="ko-KR" altLang="en-US" sz="3200" b="1" dirty="0">
                 <a:solidFill>
                   <a:srgbClr val="1F2937"/>
                 </a:solidFill>
@@ -10507,7 +10507,7 @@
               </a:rPr>
               <a:t>ㄱ</a:t>
             </a:r>
-            <a:endParaRPr lang="ko-KR" sz="2400" dirty="0"/>
+            <a:endParaRPr lang="ko-KR" sz="3200" dirty="0"/>
           </a:p>
         </p:txBody>
       </p:sp>
@@ -10519,8 +10519,8 @@
         </p:nvSpPr>
         <p:spPr>
           <a:xfrm>
-            <a:off x="1267697" y="4561406"/>
-            <a:ext cx="408432" cy="381000"/>
+            <a:off x="1041302" y="4619826"/>
+            <a:ext cx="508000" cy="508000"/>
           </a:xfrm>
           <a:prstGeom prst="rect">
             <a:avLst/>
@@ -10536,7 +10536,7 @@
               <a:buNone/>
             </a:pPr>
             <a:r>
-              <a:rPr lang="ko-KR" altLang="en-US" sz="2400" b="1" dirty="0">
+              <a:rPr lang="ko-KR" altLang="en-US" sz="3200" b="1" dirty="0">
                 <a:solidFill>
                   <a:srgbClr val="1F2937"/>
                 </a:solidFill>
@@ -10546,7 +10546,7 @@
               </a:rPr>
               <a:t>ㄴ</a:t>
             </a:r>
-            <a:endParaRPr lang="ko-KR" sz="2400" dirty="0"/>
+            <a:endParaRPr lang="ko-KR" sz="3200" dirty="0"/>
           </a:p>
         </p:txBody>
       </p:sp>
@@ -10558,8 +10558,8 @@
         </p:nvSpPr>
         <p:spPr>
           <a:xfrm>
-            <a:off x="3953108" y="4198620"/>
-            <a:ext cx="408432" cy="381000"/>
+            <a:off x="4009291" y="4257040"/>
+            <a:ext cx="508000" cy="508000"/>
           </a:xfrm>
           <a:prstGeom prst="rect">
             <a:avLst/>
@@ -10575,7 +10575,7 @@
               <a:buNone/>
             </a:pPr>
             <a:r>
-              <a:rPr lang="ko-KR" altLang="en-US" sz="2400" b="1" dirty="0">
+              <a:rPr lang="ko-KR" altLang="en-US" sz="3200" b="1" dirty="0">
                 <a:solidFill>
                   <a:srgbClr val="1F2937"/>
                 </a:solidFill>
@@ -10585,7 +10585,7 @@
               </a:rPr>
               <a:t>ㄷ</a:t>
             </a:r>
-            <a:endParaRPr lang="ko-KR" sz="2400" dirty="0"/>
+            <a:endParaRPr lang="ko-KR" sz="3200" dirty="0"/>
           </a:p>
         </p:txBody>
       </p:sp>
@@ -10997,7 +10997,7 @@
         </p:nvSpPr>
         <p:spPr>
           <a:xfrm>
-            <a:off x="7329687" y="4236720"/>
+            <a:off x="7188783" y="4358640"/>
             <a:ext cx="792480" cy="792480"/>
           </a:xfrm>
           <a:prstGeom prst="pie">
@@ -11025,8 +11025,8 @@
         </p:nvSpPr>
         <p:spPr>
           <a:xfrm flipV="1">
-            <a:off x="7725927" y="3948011"/>
-            <a:ext cx="2465815" cy="684949"/>
+            <a:off x="7585023" y="3991652"/>
+            <a:ext cx="2747622" cy="763228"/>
           </a:xfrm>
           <a:prstGeom prst="line">
             <a:avLst/>
@@ -11048,8 +11048,8 @@
         </p:nvSpPr>
         <p:spPr>
           <a:xfrm flipV="1">
-            <a:off x="7725927" y="2499360"/>
-            <a:ext cx="711200" cy="2133600"/>
+            <a:off x="7585023" y="2377440"/>
+            <a:ext cx="792480" cy="2377440"/>
           </a:xfrm>
           <a:prstGeom prst="line">
             <a:avLst/>
@@ -11071,7 +11071,7 @@
         </p:nvSpPr>
         <p:spPr>
           <a:xfrm>
-            <a:off x="9611686" y="4033192"/>
+            <a:off x="9693090" y="4093360"/>
             <a:ext cx="118872" cy="118872"/>
           </a:xfrm>
           <a:prstGeom prst="ellipse">
@@ -11096,7 +11096,7 @@
         </p:nvSpPr>
         <p:spPr>
           <a:xfrm>
-            <a:off x="7666491" y="4573524"/>
+            <a:off x="7525587" y="4695444"/>
             <a:ext cx="118872" cy="118872"/>
           </a:xfrm>
           <a:prstGeom prst="ellipse">
@@ -11121,7 +11121,7 @@
         </p:nvSpPr>
         <p:spPr>
           <a:xfrm>
-            <a:off x="8206823" y="2952528"/>
+            <a:off x="8127671" y="2889191"/>
             <a:ext cx="118872" cy="118872"/>
           </a:xfrm>
           <a:prstGeom prst="ellipse">
@@ -11146,8 +11146,8 @@
         </p:nvSpPr>
         <p:spPr>
           <a:xfrm>
-            <a:off x="9401644" y="3667184"/>
-            <a:ext cx="408432" cy="381000"/>
+            <a:off x="9433264" y="3663852"/>
+            <a:ext cx="508000" cy="508000"/>
           </a:xfrm>
           <a:prstGeom prst="rect">
             <a:avLst/>
@@ -11163,7 +11163,7 @@
               <a:buNone/>
             </a:pPr>
             <a:r>
-              <a:rPr lang="ko-KR" altLang="en-US" sz="2400" b="1" dirty="0">
+              <a:rPr lang="ko-KR" altLang="en-US" sz="3200" b="1" dirty="0">
                 <a:solidFill>
                   <a:srgbClr val="1F2937"/>
                 </a:solidFill>
@@ -11173,7 +11173,7 @@
               </a:rPr>
               <a:t>ㄹ</a:t>
             </a:r>
-            <a:endParaRPr lang="ko-KR" sz="2400" dirty="0"/>
+            <a:endParaRPr lang="ko-KR" sz="3200" dirty="0"/>
           </a:p>
         </p:txBody>
       </p:sp>
@@ -11185,8 +11185,8 @@
         </p:nvSpPr>
         <p:spPr>
           <a:xfrm>
-            <a:off x="7344966" y="4610446"/>
-            <a:ext cx="408432" cy="381000"/>
+            <a:off x="7154278" y="4668866"/>
+            <a:ext cx="508000" cy="508000"/>
           </a:xfrm>
           <a:prstGeom prst="rect">
             <a:avLst/>
@@ -11202,7 +11202,7 @@
               <a:buNone/>
             </a:pPr>
             <a:r>
-              <a:rPr lang="ko-KR" altLang="en-US" sz="2400" b="1" dirty="0">
+              <a:rPr lang="ko-KR" altLang="en-US" sz="3200" b="1" dirty="0">
                 <a:solidFill>
                   <a:srgbClr val="1F2937"/>
                 </a:solidFill>
@@ -11212,7 +11212,7 @@
               </a:rPr>
               <a:t>ㅁ</a:t>
             </a:r>
-            <a:endParaRPr lang="ko-KR" sz="2400" dirty="0"/>
+            <a:endParaRPr lang="ko-KR" sz="3200" dirty="0"/>
           </a:p>
         </p:txBody>
       </p:sp>
@@ -11224,8 +11224,8 @@
         </p:nvSpPr>
         <p:spPr>
           <a:xfrm>
-            <a:off x="7830716" y="2744355"/>
-            <a:ext cx="408432" cy="381000"/>
+            <a:off x="7701780" y="2617518"/>
+            <a:ext cx="508000" cy="508000"/>
           </a:xfrm>
           <a:prstGeom prst="rect">
             <a:avLst/>
@@ -11241,7 +11241,7 @@
               <a:buNone/>
             </a:pPr>
             <a:r>
-              <a:rPr lang="ko-KR" altLang="en-US" sz="2400" b="1" dirty="0">
+              <a:rPr lang="ko-KR" altLang="en-US" sz="3200" b="1" dirty="0">
                 <a:solidFill>
                   <a:srgbClr val="1F2937"/>
                 </a:solidFill>
@@ -11251,7 +11251,7 @@
               </a:rPr>
               <a:t>ㅂ</a:t>
             </a:r>
-            <a:endParaRPr lang="ko-KR" sz="2400" dirty="0"/>
+            <a:endParaRPr lang="ko-KR" sz="3200" dirty="0"/>
           </a:p>
         </p:txBody>
       </p:sp>
